--- a/Contoso Power Story - 20 May (Operations).pptx
+++ b/Contoso Power Story - 20 May (Operations).pptx
@@ -3527,7 +3527,7 @@
                 </a:solidFill>
                 <a:latin typeface="Segoe UI"/>
               </a:rPr>
-              <a:t>8:30am — plant brief for the 10am exec.</a:t>
+              <a:t>Plant briefing for the 10am exec call.</a:t>
             </a:r>
           </a:p>
           <a:p>
@@ -3539,7 +3539,7 @@
                 </a:solidFill>
                 <a:latin typeface="Segoe UI"/>
               </a:rPr>
-              <a:t>11:00am — procurement minutes by lunch.</a:t>
+              <a:t>Procurement Committee minutes by lunch.</a:t>
             </a:r>
           </a:p>
           <a:p>
@@ -3551,7 +3551,7 @@
                 </a:solidFill>
                 <a:latin typeface="Segoe UI"/>
               </a:rPr>
-              <a:t>2:00pm — PMO weekly status drafted.</a:t>
+              <a:t>PMO weekly status drafted in the afternoon.</a:t>
             </a:r>
           </a:p>
           <a:p>
@@ -3563,7 +3563,7 @@
                 </a:solidFill>
                 <a:latin typeface="Segoe UI"/>
               </a:rPr>
-              <a:t>4:00pm — HR policy &amp; CoSec resolution reviewed.</a:t>
+              <a:t>HR policy &amp; Board resolution reviewed before close of business.</a:t>
             </a:r>
           </a:p>
         </p:txBody>
@@ -3678,7 +3678,19 @@
                 </a:solidFill>
                 <a:latin typeface="Segoe UI"/>
               </a:rPr>
-              <a:t>A morning of board-grade outputs — before lunch.</a:t>
+              <a:t>One morning. Five Copilot surfaces.</a:t>
+            </a:r>
+          </a:p>
+          <a:p>
+            <a:pPr algn="l"/>
+            <a:r>
+              <a:rPr sz="1300" b="1">
+                <a:solidFill>
+                  <a:srgbClr val="FFFFFF"/>
+                </a:solidFill>
+                <a:latin typeface="Segoe UI"/>
+              </a:rPr>
+              <a:t>From plant floor to board minutes.</a:t>
             </a:r>
           </a:p>
         </p:txBody>
@@ -3906,7 +3918,7 @@
                 </a:solidFill>
                 <a:latin typeface="Segoe UI"/>
               </a:rPr>
-              <a:t>EXCEL COPILOT  ·  ANALYST  ·  EXCEL AGENT  ·  POWERPOINT COPILOT</a:t>
+              <a:t>EXCEL COPILOT</a:t>
             </a:r>
           </a:p>
         </p:txBody>
@@ -4013,13 +4025,13 @@
           <a:p>
             <a:pPr algn="l"/>
             <a:r>
-              <a:rPr sz="1300" b="1">
+              <a:rPr sz="1250" b="1">
                 <a:solidFill>
                   <a:srgbClr val="1A202C"/>
                 </a:solidFill>
                 <a:latin typeface="Segoe UI"/>
               </a:rPr>
-              <a:t>Daily Ops Performance</a:t>
+              <a:t>Six plants, 30 days, one summary</a:t>
             </a:r>
           </a:p>
         </p:txBody>
@@ -4048,25 +4060,13 @@
           <a:p>
             <a:pPr algn="l"/>
             <a:r>
-              <a:rPr sz="900" b="0">
+              <a:rPr sz="1000" b="0">
                 <a:solidFill>
                   <a:srgbClr val="64748B"/>
                 </a:solidFill>
                 <a:latin typeface="Segoe UI"/>
               </a:rPr>
-              <a:t>CORE · Excel Copilot — KPI table, RAG vs targets, trend chart, 5-bullet management commentary from 6 plants × 30 days of data.</a:t>
-            </a:r>
-          </a:p>
-          <a:p>
-            <a:pPr algn="l"/>
-            <a:r>
-              <a:rPr sz="900" b="0">
-                <a:solidFill>
-                  <a:srgbClr val="64748B"/>
-                </a:solidFill>
-                <a:latin typeface="Segoe UI"/>
-              </a:rPr>
-              <a:t>STRETCH · Analyst — deeper variance &amp; correlation analysis · Excel agent — one-shot Fleet Operations Rollup workbook · PowerPoint Copilot — 5-slide Ops Review deck.</a:t>
+              <a:t>Daily SCADA export → KPI summary by plant (availability, heat rate, forced outage), RAG against targets, trend chart, Power BI-ready table, 5-bullet commentary.</a:t>
             </a:r>
           </a:p>
         </p:txBody>
@@ -4224,7 +4224,7 @@
                 </a:solidFill>
                 <a:latin typeface="Segoe UI"/>
               </a:rPr>
-              <a:t>WORD COPILOT  ·  TEAMS RECAP  ·  WORD AGENT  ·  RESEARCHER</a:t>
+              <a:t>TEAMS RECAP  →  WORD COPILOT</a:t>
             </a:r>
           </a:p>
         </p:txBody>
@@ -4331,13 +4331,13 @@
           <a:p>
             <a:pPr algn="l"/>
             <a:r>
-              <a:rPr sz="1300" b="1">
+              <a:rPr sz="1250" b="1">
                 <a:solidFill>
                   <a:srgbClr val="1A202C"/>
                 </a:solidFill>
                 <a:latin typeface="Segoe UI"/>
               </a:rPr>
-              <a:t>Procurement → Board-quality minutes</a:t>
+              <a:t>Capture the meeting → formal minutes</a:t>
             </a:r>
           </a:p>
         </p:txBody>
@@ -4366,25 +4366,13 @@
           <a:p>
             <a:pPr algn="l"/>
             <a:r>
-              <a:rPr sz="900" b="0">
+              <a:rPr sz="1000" b="0">
                 <a:solidFill>
                   <a:srgbClr val="64748B"/>
                 </a:solidFill>
                 <a:latin typeface="Segoe UI"/>
               </a:rPr>
-              <a:t>CORE · Word Copilot — Teams Recap transcript into formal Procurement minutes + risk annex · Copilot Chat — cover email to the Tender Committee.</a:t>
-            </a:r>
-          </a:p>
-          <a:p>
-            <a:pPr algn="l"/>
-            <a:r>
-              <a:rPr sz="900" b="0">
-                <a:solidFill>
-                  <a:srgbClr val="64748B"/>
-                </a:solidFill>
-                <a:latin typeface="Segoe UI"/>
-              </a:rPr>
-              <a:t>STRETCH · Word agent — one-shot minutes (compare to Word Copilot) · Researcher — pre-award vendor reputation check (Critique mode).</a:t>
+              <a:t>Vendor evaluation auto-transcribed; decisions and actions surfaced. Transcript → Procurement Committee minutes + risk annex + cover email.</a:t>
             </a:r>
           </a:p>
         </p:txBody>
@@ -4542,7 +4530,7 @@
                 </a:solidFill>
                 <a:latin typeface="Segoe UI"/>
               </a:rPr>
-              <a:t>PLANNER AGENT  ·  POWERPOINT AGENT</a:t>
+              <a:t>PLANNER AGENT</a:t>
             </a:r>
           </a:p>
         </p:txBody>
@@ -4649,13 +4637,13 @@
           <a:p>
             <a:pPr algn="l"/>
             <a:r>
-              <a:rPr sz="1300" b="1">
+              <a:rPr sz="1250" b="1">
                 <a:solidFill>
                   <a:srgbClr val="1A202C"/>
                 </a:solidFill>
                 <a:latin typeface="Segoe UI"/>
               </a:rPr>
-              <a:t>PMO weekly status</a:t>
+              <a:t>From spreadsheet to live plan to status</a:t>
             </a:r>
           </a:p>
         </p:txBody>
@@ -4684,25 +4672,13 @@
           <a:p>
             <a:pPr algn="l"/>
             <a:r>
-              <a:rPr sz="900" b="0">
+              <a:rPr sz="1000" b="0">
                 <a:solidFill>
                   <a:srgbClr val="64748B"/>
                 </a:solidFill>
                 <a:latin typeface="Segoe UI"/>
               </a:rPr>
-              <a:t>CORE · Planner agent — bootstrap the plan from the portfolio Excel, surface Red/Amber tasks, draft the weekly Steering Committee status — grounded in real Planner data.</a:t>
-            </a:r>
-          </a:p>
-          <a:p>
-            <a:pPr algn="l"/>
-            <a:r>
-              <a:rPr sz="900" b="0">
-                <a:solidFill>
-                  <a:srgbClr val="64748B"/>
-                </a:solidFill>
-                <a:latin typeface="Segoe UI"/>
-              </a:rPr>
-              <a:t>STRETCH · PowerPoint agent — turn the status into a 6-slide PMO Review deck with speaker notes.</a:t>
+              <a:t>Bootstrap a Planner plan from the capital project portfolio. Surface Red/Amber tasks. Draft the weekly status update for the Steering Committee — all grounded in real Planner data.</a:t>
             </a:r>
           </a:p>
         </p:txBody>
@@ -4860,7 +4836,7 @@
                 </a:solidFill>
                 <a:latin typeface="Segoe UI"/>
               </a:rPr>
-              <a:t>WORD COPILOT  ·  COWORK</a:t>
+              <a:t>WORD COPILOT</a:t>
             </a:r>
           </a:p>
         </p:txBody>
@@ -4967,13 +4943,13 @@
           <a:p>
             <a:pPr algn="l"/>
             <a:r>
-              <a:rPr sz="1300" b="1">
+              <a:rPr sz="1250" b="1">
                 <a:solidFill>
                   <a:srgbClr val="1A202C"/>
                 </a:solidFill>
                 <a:latin typeface="Segoe UI"/>
               </a:rPr>
-              <a:t>HR policy &amp; Board resolution</a:t>
+              <a:t>First draft in five minutes</a:t>
             </a:r>
           </a:p>
         </p:txBody>
@@ -5002,25 +4978,13 @@
           <a:p>
             <a:pPr algn="l"/>
             <a:r>
-              <a:rPr sz="900" b="0">
+              <a:rPr sz="1000" b="0">
                 <a:solidFill>
                   <a:srgbClr val="64748B"/>
                 </a:solidFill>
                 <a:latin typeface="Segoe UI"/>
               </a:rPr>
-              <a:t>CORE · Word Copilot — Hybrid Working Policy (HR path) OR Directors' Circular Resolution (CoSec path).</a:t>
-            </a:r>
-          </a:p>
-          <a:p>
-            <a:pPr algn="l"/>
-            <a:r>
-              <a:rPr sz="900" b="0">
-                <a:solidFill>
-                  <a:srgbClr val="64748B"/>
-                </a:solidFill>
-                <a:latin typeface="Segoe UI"/>
-              </a:rPr>
-              <a:t>STRETCH · Cowork — single-file HTML HR self-service portal (policy cards, FAQ, quick links, contact HR).</a:t>
+              <a:t>HR Hybrid Working Policy (600 words) — or Directors' Circular Resolution for the Sumitec boiler tube contract award. Judgment calls stay with you.</a:t>
             </a:r>
           </a:p>
         </p:txBody>

--- a/Contoso Power Story - 20 May (Operations).pptx
+++ b/Contoso Power Story - 20 May (Operations).pptx
@@ -3918,7 +3918,7 @@
                 </a:solidFill>
                 <a:latin typeface="Segoe UI"/>
               </a:rPr>
-              <a:t>EXCEL COPILOT</a:t>
+              <a:t>EXCEL COPILOT  +  3 MORE</a:t>
             </a:r>
           </a:p>
         </p:txBody>
@@ -4010,7 +4010,7 @@
         <p:spPr>
           <a:xfrm>
             <a:off x="4096512" y="1874520"/>
-            <a:ext cx="3611880" cy="365760"/>
+            <a:ext cx="3611880" cy="320040"/>
           </a:xfrm>
           <a:prstGeom prst="rect">
             <a:avLst/>
@@ -4025,13 +4025,13 @@
           <a:p>
             <a:pPr algn="l"/>
             <a:r>
-              <a:rPr sz="1250" b="1">
+              <a:rPr sz="1200" b="1">
                 <a:solidFill>
                   <a:srgbClr val="1A202C"/>
                 </a:solidFill>
                 <a:latin typeface="Segoe UI"/>
               </a:rPr>
-              <a:t>Six plants, 30 days, one summary</a:t>
+              <a:t>Daily Ops Performance</a:t>
             </a:r>
           </a:p>
         </p:txBody>
@@ -4044,8 +4044,8 @@
         </p:nvSpPr>
         <p:spPr>
           <a:xfrm>
-            <a:off x="4096512" y="2267712"/>
-            <a:ext cx="3611880" cy="1463040"/>
+            <a:off x="4096512" y="2212848"/>
+            <a:ext cx="3611880" cy="1508760"/>
           </a:xfrm>
           <a:prstGeom prst="rect">
             <a:avLst/>
@@ -4060,13 +4060,25 @@
           <a:p>
             <a:pPr algn="l"/>
             <a:r>
-              <a:rPr sz="1000" b="0">
+              <a:rPr sz="900" b="0">
                 <a:solidFill>
                   <a:srgbClr val="64748B"/>
                 </a:solidFill>
                 <a:latin typeface="Segoe UI"/>
               </a:rPr>
-              <a:t>Daily SCADA export → KPI summary by plant (availability, heat rate, forced outage), RAG against targets, trend chart, Power BI-ready table, 5-bullet commentary.</a:t>
+              <a:t>CORE · Excel Copilot — 6 plants × 30 days → KPI table, RAG vs targets, trend chart, 5-bullet commentary.</a:t>
+            </a:r>
+          </a:p>
+          <a:p>
+            <a:pPr algn="l"/>
+            <a:r>
+              <a:rPr sz="900" b="0">
+                <a:solidFill>
+                  <a:srgbClr val="64748B"/>
+                </a:solidFill>
+                <a:latin typeface="Segoe UI"/>
+              </a:rPr>
+              <a:t>STRETCH · Analyst — variance + correlation deep-dive  ·  Excel agent — one-shot Fleet Rollup workbook  ·  PowerPoint Copilot — 5-slide Ops Review deck.</a:t>
             </a:r>
           </a:p>
         </p:txBody>
@@ -4224,7 +4236,7 @@
                 </a:solidFill>
                 <a:latin typeface="Segoe UI"/>
               </a:rPr>
-              <a:t>TEAMS RECAP  →  WORD COPILOT</a:t>
+              <a:t>TEAMS RECAP  →  WORD  +  3 MORE</a:t>
             </a:r>
           </a:p>
         </p:txBody>
@@ -4316,7 +4328,7 @@
         <p:spPr>
           <a:xfrm>
             <a:off x="8119872" y="1874520"/>
-            <a:ext cx="3611880" cy="365760"/>
+            <a:ext cx="3611880" cy="320040"/>
           </a:xfrm>
           <a:prstGeom prst="rect">
             <a:avLst/>
@@ -4331,13 +4343,13 @@
           <a:p>
             <a:pPr algn="l"/>
             <a:r>
-              <a:rPr sz="1250" b="1">
+              <a:rPr sz="1200" b="1">
                 <a:solidFill>
                   <a:srgbClr val="1A202C"/>
                 </a:solidFill>
                 <a:latin typeface="Segoe UI"/>
               </a:rPr>
-              <a:t>Capture the meeting → formal minutes</a:t>
+              <a:t>Procurement → Board-quality minutes</a:t>
             </a:r>
           </a:p>
         </p:txBody>
@@ -4350,8 +4362,8 @@
         </p:nvSpPr>
         <p:spPr>
           <a:xfrm>
-            <a:off x="8119872" y="2267712"/>
-            <a:ext cx="3611880" cy="1463040"/>
+            <a:off x="8119872" y="2212848"/>
+            <a:ext cx="3611880" cy="1508760"/>
           </a:xfrm>
           <a:prstGeom prst="rect">
             <a:avLst/>
@@ -4366,13 +4378,25 @@
           <a:p>
             <a:pPr algn="l"/>
             <a:r>
-              <a:rPr sz="1000" b="0">
+              <a:rPr sz="900" b="0">
                 <a:solidFill>
                   <a:srgbClr val="64748B"/>
                 </a:solidFill>
                 <a:latin typeface="Segoe UI"/>
               </a:rPr>
-              <a:t>Vendor evaluation auto-transcribed; decisions and actions surfaced. Transcript → Procurement Committee minutes + risk annex + cover email.</a:t>
+              <a:t>CORE · Teams Recap captures the meeting; Word Copilot drafts formal minutes + risk annex; Copilot Chat writes the cover email.</a:t>
+            </a:r>
+          </a:p>
+          <a:p>
+            <a:pPr algn="l"/>
+            <a:r>
+              <a:rPr sz="900" b="0">
+                <a:solidFill>
+                  <a:srgbClr val="64748B"/>
+                </a:solidFill>
+                <a:latin typeface="Segoe UI"/>
+              </a:rPr>
+              <a:t>STRETCH · Word agent — one-shot minutes (compare)  ·  Researcher (Critique) — pre-award vendor reputation check.</a:t>
             </a:r>
           </a:p>
         </p:txBody>
@@ -4530,7 +4554,7 @@
                 </a:solidFill>
                 <a:latin typeface="Segoe UI"/>
               </a:rPr>
-              <a:t>PLANNER AGENT</a:t>
+              <a:t>PLANNER AGENT  +  POWERPOINT AGENT</a:t>
             </a:r>
           </a:p>
         </p:txBody>
@@ -4622,7 +4646,7 @@
         <p:spPr>
           <a:xfrm>
             <a:off x="4096512" y="4480560"/>
-            <a:ext cx="3611880" cy="365760"/>
+            <a:ext cx="3611880" cy="320040"/>
           </a:xfrm>
           <a:prstGeom prst="rect">
             <a:avLst/>
@@ -4637,13 +4661,13 @@
           <a:p>
             <a:pPr algn="l"/>
             <a:r>
-              <a:rPr sz="1250" b="1">
+              <a:rPr sz="1200" b="1">
                 <a:solidFill>
                   <a:srgbClr val="1A202C"/>
                 </a:solidFill>
                 <a:latin typeface="Segoe UI"/>
               </a:rPr>
-              <a:t>From spreadsheet to live plan to status</a:t>
+              <a:t>PMO weekly status</a:t>
             </a:r>
           </a:p>
         </p:txBody>
@@ -4656,8 +4680,8 @@
         </p:nvSpPr>
         <p:spPr>
           <a:xfrm>
-            <a:off x="4096512" y="4873752"/>
-            <a:ext cx="3611880" cy="1463040"/>
+            <a:off x="4096512" y="4818888"/>
+            <a:ext cx="3611880" cy="1508760"/>
           </a:xfrm>
           <a:prstGeom prst="rect">
             <a:avLst/>
@@ -4672,13 +4696,25 @@
           <a:p>
             <a:pPr algn="l"/>
             <a:r>
-              <a:rPr sz="1000" b="0">
+              <a:rPr sz="900" b="0">
                 <a:solidFill>
                   <a:srgbClr val="64748B"/>
                 </a:solidFill>
                 <a:latin typeface="Segoe UI"/>
               </a:rPr>
-              <a:t>Bootstrap a Planner plan from the capital project portfolio. Surface Red/Amber tasks. Draft the weekly status update for the Steering Committee — all grounded in real Planner data.</a:t>
+              <a:t>CORE · Planner agent — bootstrap the plan from the portfolio Excel; surface Red/Amber tasks; draft the Steering Committee weekly status — grounded in real Planner data.</a:t>
+            </a:r>
+          </a:p>
+          <a:p>
+            <a:pPr algn="l"/>
+            <a:r>
+              <a:rPr sz="900" b="0">
+                <a:solidFill>
+                  <a:srgbClr val="64748B"/>
+                </a:solidFill>
+                <a:latin typeface="Segoe UI"/>
+              </a:rPr>
+              <a:t>STRETCH · PowerPoint agent — 6-slide PMO Review deck with speaker notes.</a:t>
             </a:r>
           </a:p>
         </p:txBody>
@@ -4836,7 +4872,7 @@
                 </a:solidFill>
                 <a:latin typeface="Segoe UI"/>
               </a:rPr>
-              <a:t>WORD COPILOT</a:t>
+              <a:t>WORD COPILOT  +  COWORK</a:t>
             </a:r>
           </a:p>
         </p:txBody>
@@ -4928,7 +4964,7 @@
         <p:spPr>
           <a:xfrm>
             <a:off x="8119872" y="4480560"/>
-            <a:ext cx="3611880" cy="365760"/>
+            <a:ext cx="3611880" cy="320040"/>
           </a:xfrm>
           <a:prstGeom prst="rect">
             <a:avLst/>
@@ -4943,13 +4979,13 @@
           <a:p>
             <a:pPr algn="l"/>
             <a:r>
-              <a:rPr sz="1250" b="1">
+              <a:rPr sz="1200" b="1">
                 <a:solidFill>
                   <a:srgbClr val="1A202C"/>
                 </a:solidFill>
                 <a:latin typeface="Segoe UI"/>
               </a:rPr>
-              <a:t>First draft in five minutes</a:t>
+              <a:t>HR policy &amp; Board resolution</a:t>
             </a:r>
           </a:p>
         </p:txBody>
@@ -4962,8 +4998,8 @@
         </p:nvSpPr>
         <p:spPr>
           <a:xfrm>
-            <a:off x="8119872" y="4873752"/>
-            <a:ext cx="3611880" cy="1463040"/>
+            <a:off x="8119872" y="4818888"/>
+            <a:ext cx="3611880" cy="1508760"/>
           </a:xfrm>
           <a:prstGeom prst="rect">
             <a:avLst/>
@@ -4978,13 +5014,25 @@
           <a:p>
             <a:pPr algn="l"/>
             <a:r>
-              <a:rPr sz="1000" b="0">
+              <a:rPr sz="900" b="0">
                 <a:solidFill>
                   <a:srgbClr val="64748B"/>
                 </a:solidFill>
                 <a:latin typeface="Segoe UI"/>
               </a:rPr>
-              <a:t>HR Hybrid Working Policy (600 words) — or Directors' Circular Resolution for the Sumitec boiler tube contract award. Judgment calls stay with you.</a:t>
+              <a:t>CORE · Word Copilot — Hybrid Working Policy (HR path) OR Directors' Circular Resolution for the Sumitec contract (CoSec path).</a:t>
+            </a:r>
+          </a:p>
+          <a:p>
+            <a:pPr algn="l"/>
+            <a:r>
+              <a:rPr sz="900" b="0">
+                <a:solidFill>
+                  <a:srgbClr val="64748B"/>
+                </a:solidFill>
+                <a:latin typeface="Segoe UI"/>
+              </a:rPr>
+              <a:t>STRETCH · Cowork — single-file HTML HR self-service portal (policy cards, FAQ, quick links, contact HR).</a:t>
             </a:r>
           </a:p>
         </p:txBody>

--- a/Contoso Power Story - 20 May (Operations).pptx
+++ b/Contoso Power Story - 20 May (Operations).pptx
@@ -3861,8 +3861,8 @@
         </p:nvSpPr>
         <p:spPr>
           <a:xfrm>
-            <a:off x="4069080" y="1444752"/>
-            <a:ext cx="457200" cy="274320"/>
+            <a:off x="4096512" y="1463040"/>
+            <a:ext cx="3557016" cy="256032"/>
           </a:xfrm>
           <a:prstGeom prst="rect">
             <a:avLst/>
@@ -3877,13 +3877,13 @@
           <a:p>
             <a:pPr algn="l"/>
             <a:r>
-              <a:rPr sz="1300" b="1">
+              <a:rPr sz="1000" b="1">
                 <a:solidFill>
                   <a:srgbClr val="FFFFFF"/>
                 </a:solidFill>
                 <a:latin typeface="Segoe UI"/>
               </a:rPr>
-              <a:t>01</a:t>
+              <a:t>EXCEL COPILOT  +  3 MORE</a:t>
             </a:r>
           </a:p>
         </p:txBody>
@@ -3896,8 +3896,8 @@
         </p:nvSpPr>
         <p:spPr>
           <a:xfrm>
-            <a:off x="4480560" y="1472184"/>
-            <a:ext cx="2514600" cy="256032"/>
+            <a:off x="4096512" y="1874520"/>
+            <a:ext cx="3611880" cy="320040"/>
           </a:xfrm>
           <a:prstGeom prst="rect">
             <a:avLst/>
@@ -3912,27 +3912,74 @@
           <a:p>
             <a:pPr algn="l"/>
             <a:r>
-              <a:rPr sz="900" b="1">
-                <a:solidFill>
-                  <a:srgbClr val="FFFFFF"/>
+              <a:rPr sz="1250" b="1">
+                <a:solidFill>
+                  <a:srgbClr val="1A202C"/>
                 </a:solidFill>
                 <a:latin typeface="Segoe UI"/>
               </a:rPr>
-              <a:t>EXCEL COPILOT  +  3 MORE</a:t>
-            </a:r>
-          </a:p>
-        </p:txBody>
-      </p:sp>
-      <p:sp>
-        <p:nvSpPr>
-          <p:cNvPr id="23" name="Rounded Rectangle 22"/>
+              <a:t>Daily Ops Performance</a:t>
+            </a:r>
+          </a:p>
+        </p:txBody>
+      </p:sp>
+      <p:sp>
+        <p:nvSpPr>
+          <p:cNvPr id="23" name="TextBox 22"/>
+          <p:cNvSpPr txBox="1"/>
+          <p:nvPr/>
+        </p:nvSpPr>
+        <p:spPr>
+          <a:xfrm>
+            <a:off x="4096512" y="2212848"/>
+            <a:ext cx="3611880" cy="1508760"/>
+          </a:xfrm>
+          <a:prstGeom prst="rect">
+            <a:avLst/>
+          </a:prstGeom>
+          <a:noFill/>
+        </p:spPr>
+        <p:txBody>
+          <a:bodyPr wrap="square" lIns="45720" rIns="45720" tIns="27432" bIns="27432" anchor="t">
+            <a:spAutoFit/>
+          </a:bodyPr>
+          <a:lstStyle/>
+          <a:p>
+            <a:pPr algn="l"/>
+            <a:r>
+              <a:rPr sz="950" b="0">
+                <a:solidFill>
+                  <a:srgbClr val="64748B"/>
+                </a:solidFill>
+                <a:latin typeface="Segoe UI"/>
+              </a:rPr>
+              <a:t>CORE · Excel Copilot — 6 plants × 30 days → KPI table, RAG vs targets, trend chart, 5-bullet commentary.</a:t>
+            </a:r>
+          </a:p>
+          <a:p>
+            <a:pPr algn="l"/>
+            <a:r>
+              <a:rPr sz="950" b="0">
+                <a:solidFill>
+                  <a:srgbClr val="64748B"/>
+                </a:solidFill>
+                <a:latin typeface="Segoe UI"/>
+              </a:rPr>
+              <a:t>STRETCH · Analyst — variance + correlation deep-dive  ·  Excel agent — one-shot Fleet Rollup workbook  ·  PowerPoint Copilot — 5-slide Ops Review deck.</a:t>
+            </a:r>
+          </a:p>
+        </p:txBody>
+      </p:sp>
+      <p:sp>
+        <p:nvSpPr>
+          <p:cNvPr id="24" name="Rounded Rectangle 23"/>
           <p:cNvSpPr/>
           <p:nvPr/>
         </p:nvSpPr>
         <p:spPr>
           <a:xfrm>
-            <a:off x="6949440" y="1453896"/>
-            <a:ext cx="731520" cy="256032"/>
+            <a:off x="7955280" y="1371600"/>
+            <a:ext cx="3886200" cy="2423160"/>
           </a:xfrm>
           <a:prstGeom prst="roundRect">
             <a:avLst/>
@@ -3940,8 +3987,10 @@
           <a:solidFill>
             <a:srgbClr val="FFFFFF"/>
           </a:solidFill>
-          <a:ln>
-            <a:noFill/>
+          <a:ln w="9525">
+            <a:solidFill>
+              <a:srgbClr val="D1D9E6"/>
+            </a:solidFill>
           </a:ln>
         </p:spPr>
         <p:style>
@@ -3968,142 +4017,23 @@
       </p:sp>
       <p:sp>
         <p:nvSpPr>
-          <p:cNvPr id="24" name="TextBox 23"/>
-          <p:cNvSpPr txBox="1"/>
+          <p:cNvPr id="25" name="Rectangle 24"/>
+          <p:cNvSpPr/>
           <p:nvPr/>
         </p:nvSpPr>
         <p:spPr>
           <a:xfrm>
-            <a:off x="6949440" y="1463040"/>
-            <a:ext cx="731520" cy="246888"/>
+            <a:off x="7955280" y="1371600"/>
+            <a:ext cx="3886200" cy="411480"/>
           </a:xfrm>
           <a:prstGeom prst="rect">
             <a:avLst/>
           </a:prstGeom>
-          <a:noFill/>
-        </p:spPr>
-        <p:txBody>
-          <a:bodyPr wrap="square" lIns="45720" rIns="45720" tIns="27432" bIns="27432" anchor="ctr">
-            <a:spAutoFit/>
-          </a:bodyPr>
-          <a:lstStyle/>
-          <a:p>
-            <a:pPr algn="ctr"/>
-            <a:r>
-              <a:rPr sz="850" b="1">
-                <a:solidFill>
-                  <a:srgbClr val="1E3A5F"/>
-                </a:solidFill>
-                <a:latin typeface="Segoe UI"/>
-              </a:rPr>
-              <a:t>25 min</a:t>
-            </a:r>
-          </a:p>
-        </p:txBody>
-      </p:sp>
-      <p:sp>
-        <p:nvSpPr>
-          <p:cNvPr id="25" name="TextBox 24"/>
-          <p:cNvSpPr txBox="1"/>
-          <p:nvPr/>
-        </p:nvSpPr>
-        <p:spPr>
-          <a:xfrm>
-            <a:off x="4096512" y="1874520"/>
-            <a:ext cx="3611880" cy="320040"/>
-          </a:xfrm>
-          <a:prstGeom prst="rect">
-            <a:avLst/>
-          </a:prstGeom>
-          <a:noFill/>
-        </p:spPr>
-        <p:txBody>
-          <a:bodyPr wrap="square" lIns="45720" rIns="45720" tIns="27432" bIns="27432" anchor="t">
-            <a:spAutoFit/>
-          </a:bodyPr>
-          <a:lstStyle/>
-          <a:p>
-            <a:pPr algn="l"/>
-            <a:r>
-              <a:rPr sz="1200" b="1">
-                <a:solidFill>
-                  <a:srgbClr val="1A202C"/>
-                </a:solidFill>
-                <a:latin typeface="Segoe UI"/>
-              </a:rPr>
-              <a:t>Daily Ops Performance</a:t>
-            </a:r>
-          </a:p>
-        </p:txBody>
-      </p:sp>
-      <p:sp>
-        <p:nvSpPr>
-          <p:cNvPr id="26" name="TextBox 25"/>
-          <p:cNvSpPr txBox="1"/>
-          <p:nvPr/>
-        </p:nvSpPr>
-        <p:spPr>
-          <a:xfrm>
-            <a:off x="4096512" y="2212848"/>
-            <a:ext cx="3611880" cy="1508760"/>
-          </a:xfrm>
-          <a:prstGeom prst="rect">
-            <a:avLst/>
-          </a:prstGeom>
-          <a:noFill/>
-        </p:spPr>
-        <p:txBody>
-          <a:bodyPr wrap="square" lIns="45720" rIns="45720" tIns="27432" bIns="27432" anchor="t">
-            <a:spAutoFit/>
-          </a:bodyPr>
-          <a:lstStyle/>
-          <a:p>
-            <a:pPr algn="l"/>
-            <a:r>
-              <a:rPr sz="900" b="0">
-                <a:solidFill>
-                  <a:srgbClr val="64748B"/>
-                </a:solidFill>
-                <a:latin typeface="Segoe UI"/>
-              </a:rPr>
-              <a:t>CORE · Excel Copilot — 6 plants × 30 days → KPI table, RAG vs targets, trend chart, 5-bullet commentary.</a:t>
-            </a:r>
-          </a:p>
-          <a:p>
-            <a:pPr algn="l"/>
-            <a:r>
-              <a:rPr sz="900" b="0">
-                <a:solidFill>
-                  <a:srgbClr val="64748B"/>
-                </a:solidFill>
-                <a:latin typeface="Segoe UI"/>
-              </a:rPr>
-              <a:t>STRETCH · Analyst — variance + correlation deep-dive  ·  Excel agent — one-shot Fleet Rollup workbook  ·  PowerPoint Copilot — 5-slide Ops Review deck.</a:t>
-            </a:r>
-          </a:p>
-        </p:txBody>
-      </p:sp>
-      <p:sp>
-        <p:nvSpPr>
-          <p:cNvPr id="27" name="Rounded Rectangle 26"/>
-          <p:cNvSpPr/>
-          <p:nvPr/>
-        </p:nvSpPr>
-        <p:spPr>
-          <a:xfrm>
-            <a:off x="7955280" y="1371600"/>
-            <a:ext cx="3886200" cy="2423160"/>
-          </a:xfrm>
-          <a:prstGeom prst="roundRect">
-            <a:avLst/>
-          </a:prstGeom>
           <a:solidFill>
-            <a:srgbClr val="FFFFFF"/>
+            <a:srgbClr val="0E7490"/>
           </a:solidFill>
-          <a:ln w="9525">
-            <a:solidFill>
-              <a:srgbClr val="D1D9E6"/>
-            </a:solidFill>
+          <a:ln>
+            <a:noFill/>
           </a:ln>
         </p:spPr>
         <p:style>
@@ -4130,23 +4060,142 @@
       </p:sp>
       <p:sp>
         <p:nvSpPr>
-          <p:cNvPr id="28" name="Rectangle 27"/>
-          <p:cNvSpPr/>
+          <p:cNvPr id="26" name="TextBox 25"/>
+          <p:cNvSpPr txBox="1"/>
           <p:nvPr/>
         </p:nvSpPr>
         <p:spPr>
           <a:xfrm>
-            <a:off x="7955280" y="1371600"/>
-            <a:ext cx="3886200" cy="411480"/>
+            <a:off x="8119872" y="1463040"/>
+            <a:ext cx="3557016" cy="256032"/>
           </a:xfrm>
           <a:prstGeom prst="rect">
             <a:avLst/>
           </a:prstGeom>
+          <a:noFill/>
+        </p:spPr>
+        <p:txBody>
+          <a:bodyPr wrap="square" lIns="45720" rIns="45720" tIns="27432" bIns="27432" anchor="t">
+            <a:spAutoFit/>
+          </a:bodyPr>
+          <a:lstStyle/>
+          <a:p>
+            <a:pPr algn="l"/>
+            <a:r>
+              <a:rPr sz="1000" b="1">
+                <a:solidFill>
+                  <a:srgbClr val="FFFFFF"/>
+                </a:solidFill>
+                <a:latin typeface="Segoe UI"/>
+              </a:rPr>
+              <a:t>TEAMS RECAP  →  WORD  +  3 MORE</a:t>
+            </a:r>
+          </a:p>
+        </p:txBody>
+      </p:sp>
+      <p:sp>
+        <p:nvSpPr>
+          <p:cNvPr id="27" name="TextBox 26"/>
+          <p:cNvSpPr txBox="1"/>
+          <p:nvPr/>
+        </p:nvSpPr>
+        <p:spPr>
+          <a:xfrm>
+            <a:off x="8119872" y="1874520"/>
+            <a:ext cx="3611880" cy="320040"/>
+          </a:xfrm>
+          <a:prstGeom prst="rect">
+            <a:avLst/>
+          </a:prstGeom>
+          <a:noFill/>
+        </p:spPr>
+        <p:txBody>
+          <a:bodyPr wrap="square" lIns="45720" rIns="45720" tIns="27432" bIns="27432" anchor="t">
+            <a:spAutoFit/>
+          </a:bodyPr>
+          <a:lstStyle/>
+          <a:p>
+            <a:pPr algn="l"/>
+            <a:r>
+              <a:rPr sz="1250" b="1">
+                <a:solidFill>
+                  <a:srgbClr val="1A202C"/>
+                </a:solidFill>
+                <a:latin typeface="Segoe UI"/>
+              </a:rPr>
+              <a:t>Procurement → Board-quality minutes</a:t>
+            </a:r>
+          </a:p>
+        </p:txBody>
+      </p:sp>
+      <p:sp>
+        <p:nvSpPr>
+          <p:cNvPr id="28" name="TextBox 27"/>
+          <p:cNvSpPr txBox="1"/>
+          <p:nvPr/>
+        </p:nvSpPr>
+        <p:spPr>
+          <a:xfrm>
+            <a:off x="8119872" y="2212848"/>
+            <a:ext cx="3611880" cy="1508760"/>
+          </a:xfrm>
+          <a:prstGeom prst="rect">
+            <a:avLst/>
+          </a:prstGeom>
+          <a:noFill/>
+        </p:spPr>
+        <p:txBody>
+          <a:bodyPr wrap="square" lIns="45720" rIns="45720" tIns="27432" bIns="27432" anchor="t">
+            <a:spAutoFit/>
+          </a:bodyPr>
+          <a:lstStyle/>
+          <a:p>
+            <a:pPr algn="l"/>
+            <a:r>
+              <a:rPr sz="950" b="0">
+                <a:solidFill>
+                  <a:srgbClr val="64748B"/>
+                </a:solidFill>
+                <a:latin typeface="Segoe UI"/>
+              </a:rPr>
+              <a:t>CORE · Teams Recap captures the meeting; Word Copilot drafts formal minutes + risk annex; Copilot Chat writes the cover email.</a:t>
+            </a:r>
+          </a:p>
+          <a:p>
+            <a:pPr algn="l"/>
+            <a:r>
+              <a:rPr sz="950" b="0">
+                <a:solidFill>
+                  <a:srgbClr val="64748B"/>
+                </a:solidFill>
+                <a:latin typeface="Segoe UI"/>
+              </a:rPr>
+              <a:t>STRETCH · Word agent — one-shot minutes (compare)  ·  Researcher (Critique) — pre-award vendor reputation check.</a:t>
+            </a:r>
+          </a:p>
+        </p:txBody>
+      </p:sp>
+      <p:sp>
+        <p:nvSpPr>
+          <p:cNvPr id="29" name="Rounded Rectangle 28"/>
+          <p:cNvSpPr/>
+          <p:nvPr/>
+        </p:nvSpPr>
+        <p:spPr>
+          <a:xfrm>
+            <a:off x="3931920" y="3977640"/>
+            <a:ext cx="3886200" cy="2423160"/>
+          </a:xfrm>
+          <a:prstGeom prst="roundRect">
+            <a:avLst/>
+          </a:prstGeom>
           <a:solidFill>
-            <a:srgbClr val="0E7490"/>
+            <a:srgbClr val="FFFFFF"/>
           </a:solidFill>
-          <a:ln>
-            <a:noFill/>
+          <a:ln w="9525">
+            <a:solidFill>
+              <a:srgbClr val="D1D9E6"/>
+            </a:solidFill>
           </a:ln>
         </p:spPr>
         <p:style>
@@ -4173,90 +4222,20 @@
       </p:sp>
       <p:sp>
         <p:nvSpPr>
-          <p:cNvPr id="29" name="TextBox 28"/>
-          <p:cNvSpPr txBox="1"/>
+          <p:cNvPr id="30" name="Rectangle 29"/>
+          <p:cNvSpPr/>
           <p:nvPr/>
         </p:nvSpPr>
         <p:spPr>
           <a:xfrm>
-            <a:off x="8092440" y="1444752"/>
-            <a:ext cx="457200" cy="274320"/>
+            <a:off x="3931920" y="3977640"/>
+            <a:ext cx="3886200" cy="411480"/>
           </a:xfrm>
           <a:prstGeom prst="rect">
             <a:avLst/>
           </a:prstGeom>
-          <a:noFill/>
-        </p:spPr>
-        <p:txBody>
-          <a:bodyPr wrap="square" lIns="45720" rIns="45720" tIns="27432" bIns="27432" anchor="t">
-            <a:spAutoFit/>
-          </a:bodyPr>
-          <a:lstStyle/>
-          <a:p>
-            <a:pPr algn="l"/>
-            <a:r>
-              <a:rPr sz="1300" b="1">
-                <a:solidFill>
-                  <a:srgbClr val="FFFFFF"/>
-                </a:solidFill>
-                <a:latin typeface="Segoe UI"/>
-              </a:rPr>
-              <a:t>02</a:t>
-            </a:r>
-          </a:p>
-        </p:txBody>
-      </p:sp>
-      <p:sp>
-        <p:nvSpPr>
-          <p:cNvPr id="30" name="TextBox 29"/>
-          <p:cNvSpPr txBox="1"/>
-          <p:nvPr/>
-        </p:nvSpPr>
-        <p:spPr>
-          <a:xfrm>
-            <a:off x="8503920" y="1472184"/>
-            <a:ext cx="2514600" cy="256032"/>
-          </a:xfrm>
-          <a:prstGeom prst="rect">
-            <a:avLst/>
-          </a:prstGeom>
-          <a:noFill/>
-        </p:spPr>
-        <p:txBody>
-          <a:bodyPr wrap="square" lIns="45720" rIns="45720" tIns="27432" bIns="27432" anchor="t">
-            <a:spAutoFit/>
-          </a:bodyPr>
-          <a:lstStyle/>
-          <a:p>
-            <a:pPr algn="l"/>
-            <a:r>
-              <a:rPr sz="900" b="1">
-                <a:solidFill>
-                  <a:srgbClr val="FFFFFF"/>
-                </a:solidFill>
-                <a:latin typeface="Segoe UI"/>
-              </a:rPr>
-              <a:t>TEAMS RECAP  →  WORD  +  3 MORE</a:t>
-            </a:r>
-          </a:p>
-        </p:txBody>
-      </p:sp>
-      <p:sp>
-        <p:nvSpPr>
-          <p:cNvPr id="31" name="Rounded Rectangle 30"/>
-          <p:cNvSpPr/>
-          <p:nvPr/>
-        </p:nvSpPr>
-        <p:spPr>
-          <a:xfrm>
-            <a:off x="10972800" y="1453896"/>
-            <a:ext cx="731520" cy="256032"/>
-          </a:xfrm>
-          <a:prstGeom prst="roundRect">
-            <a:avLst/>
-          </a:prstGeom>
           <a:solidFill>
-            <a:srgbClr val="FFFFFF"/>
+            <a:srgbClr val="7C3AED"/>
           </a:solidFill>
           <a:ln>
             <a:noFill/>
@@ -4286,14 +4265,14 @@
       </p:sp>
       <p:sp>
         <p:nvSpPr>
-          <p:cNvPr id="32" name="TextBox 31"/>
+          <p:cNvPr id="31" name="TextBox 30"/>
           <p:cNvSpPr txBox="1"/>
           <p:nvPr/>
         </p:nvSpPr>
         <p:spPr>
           <a:xfrm>
-            <a:off x="10972800" y="1463040"/>
-            <a:ext cx="731520" cy="246888"/>
+            <a:off x="4096512" y="4069080"/>
+            <a:ext cx="3557016" cy="256032"/>
           </a:xfrm>
           <a:prstGeom prst="rect">
             <a:avLst/>
@@ -4301,33 +4280,33 @@
           <a:noFill/>
         </p:spPr>
         <p:txBody>
-          <a:bodyPr wrap="square" lIns="45720" rIns="45720" tIns="27432" bIns="27432" anchor="ctr">
+          <a:bodyPr wrap="square" lIns="45720" rIns="45720" tIns="27432" bIns="27432" anchor="t">
             <a:spAutoFit/>
           </a:bodyPr>
           <a:lstStyle/>
           <a:p>
-            <a:pPr algn="ctr"/>
-            <a:r>
-              <a:rPr sz="850" b="1">
-                <a:solidFill>
-                  <a:srgbClr val="0E7490"/>
+            <a:pPr algn="l"/>
+            <a:r>
+              <a:rPr sz="1000" b="1">
+                <a:solidFill>
+                  <a:srgbClr val="FFFFFF"/>
                 </a:solidFill>
                 <a:latin typeface="Segoe UI"/>
               </a:rPr>
-              <a:t>22 min</a:t>
-            </a:r>
-          </a:p>
-        </p:txBody>
-      </p:sp>
-      <p:sp>
-        <p:nvSpPr>
-          <p:cNvPr id="33" name="TextBox 32"/>
+              <a:t>PLANNER AGENT  +  POWERPOINT AGENT</a:t>
+            </a:r>
+          </a:p>
+        </p:txBody>
+      </p:sp>
+      <p:sp>
+        <p:nvSpPr>
+          <p:cNvPr id="32" name="TextBox 31"/>
           <p:cNvSpPr txBox="1"/>
           <p:nvPr/>
         </p:nvSpPr>
         <p:spPr>
           <a:xfrm>
-            <a:off x="8119872" y="1874520"/>
+            <a:off x="4096512" y="4480560"/>
             <a:ext cx="3611880" cy="320040"/>
           </a:xfrm>
           <a:prstGeom prst="rect">
@@ -4343,26 +4322,26 @@
           <a:p>
             <a:pPr algn="l"/>
             <a:r>
-              <a:rPr sz="1200" b="1">
+              <a:rPr sz="1250" b="1">
                 <a:solidFill>
                   <a:srgbClr val="1A202C"/>
                 </a:solidFill>
                 <a:latin typeface="Segoe UI"/>
               </a:rPr>
-              <a:t>Procurement → Board-quality minutes</a:t>
-            </a:r>
-          </a:p>
-        </p:txBody>
-      </p:sp>
-      <p:sp>
-        <p:nvSpPr>
-          <p:cNvPr id="34" name="TextBox 33"/>
+              <a:t>PMO weekly status</a:t>
+            </a:r>
+          </a:p>
+        </p:txBody>
+      </p:sp>
+      <p:sp>
+        <p:nvSpPr>
+          <p:cNvPr id="33" name="TextBox 32"/>
           <p:cNvSpPr txBox="1"/>
           <p:nvPr/>
         </p:nvSpPr>
         <p:spPr>
           <a:xfrm>
-            <a:off x="8119872" y="2212848"/>
+            <a:off x="4096512" y="4818888"/>
             <a:ext cx="3611880" cy="1508760"/>
           </a:xfrm>
           <a:prstGeom prst="rect">
@@ -4378,38 +4357,38 @@
           <a:p>
             <a:pPr algn="l"/>
             <a:r>
-              <a:rPr sz="900" b="0">
+              <a:rPr sz="950" b="0">
                 <a:solidFill>
                   <a:srgbClr val="64748B"/>
                 </a:solidFill>
                 <a:latin typeface="Segoe UI"/>
               </a:rPr>
-              <a:t>CORE · Teams Recap captures the meeting; Word Copilot drafts formal minutes + risk annex; Copilot Chat writes the cover email.</a:t>
+              <a:t>CORE · Planner agent — bootstrap the plan from the portfolio Excel; surface Red/Amber tasks; draft the Steering Committee weekly status — grounded in real Planner data.</a:t>
             </a:r>
           </a:p>
           <a:p>
             <a:pPr algn="l"/>
             <a:r>
-              <a:rPr sz="900" b="0">
+              <a:rPr sz="950" b="0">
                 <a:solidFill>
                   <a:srgbClr val="64748B"/>
                 </a:solidFill>
                 <a:latin typeface="Segoe UI"/>
               </a:rPr>
-              <a:t>STRETCH · Word agent — one-shot minutes (compare)  ·  Researcher (Critique) — pre-award vendor reputation check.</a:t>
-            </a:r>
-          </a:p>
-        </p:txBody>
-      </p:sp>
-      <p:sp>
-        <p:nvSpPr>
-          <p:cNvPr id="35" name="Rounded Rectangle 34"/>
+              <a:t>STRETCH · PowerPoint agent — 6-slide PMO Review deck with speaker notes.</a:t>
+            </a:r>
+          </a:p>
+        </p:txBody>
+      </p:sp>
+      <p:sp>
+        <p:nvSpPr>
+          <p:cNvPr id="34" name="Rounded Rectangle 33"/>
           <p:cNvSpPr/>
           <p:nvPr/>
         </p:nvSpPr>
         <p:spPr>
           <a:xfrm>
-            <a:off x="3931920" y="3977640"/>
+            <a:off x="7955280" y="3977640"/>
             <a:ext cx="3886200" cy="2423160"/>
           </a:xfrm>
           <a:prstGeom prst="roundRect">
@@ -4448,20 +4427,20 @@
       </p:sp>
       <p:sp>
         <p:nvSpPr>
-          <p:cNvPr id="36" name="Rectangle 35"/>
+          <p:cNvPr id="35" name="Rectangle 34"/>
           <p:cNvSpPr/>
           <p:nvPr/>
         </p:nvSpPr>
         <p:spPr>
           <a:xfrm>
-            <a:off x="3931920" y="3977640"/>
+            <a:off x="7955280" y="3977640"/>
             <a:ext cx="3886200" cy="411480"/>
           </a:xfrm>
           <a:prstGeom prst="rect">
             <a:avLst/>
           </a:prstGeom>
           <a:solidFill>
-            <a:srgbClr val="7C3AED"/>
+            <a:srgbClr val="0E7490"/>
           </a:solidFill>
           <a:ln>
             <a:noFill/>
@@ -4491,14 +4470,14 @@
       </p:sp>
       <p:sp>
         <p:nvSpPr>
-          <p:cNvPr id="37" name="TextBox 36"/>
+          <p:cNvPr id="36" name="TextBox 35"/>
           <p:cNvSpPr txBox="1"/>
           <p:nvPr/>
         </p:nvSpPr>
         <p:spPr>
           <a:xfrm>
-            <a:off x="4069080" y="4050792"/>
-            <a:ext cx="457200" cy="274320"/>
+            <a:off x="8119872" y="4069080"/>
+            <a:ext cx="3557016" cy="256032"/>
           </a:xfrm>
           <a:prstGeom prst="rect">
             <a:avLst/>
@@ -4513,27 +4492,27 @@
           <a:p>
             <a:pPr algn="l"/>
             <a:r>
-              <a:rPr sz="1300" b="1">
+              <a:rPr sz="1000" b="1">
                 <a:solidFill>
                   <a:srgbClr val="FFFFFF"/>
                 </a:solidFill>
                 <a:latin typeface="Segoe UI"/>
               </a:rPr>
-              <a:t>03</a:t>
-            </a:r>
-          </a:p>
-        </p:txBody>
-      </p:sp>
-      <p:sp>
-        <p:nvSpPr>
-          <p:cNvPr id="38" name="TextBox 37"/>
+              <a:t>WORD COPILOT  +  COWORK</a:t>
+            </a:r>
+          </a:p>
+        </p:txBody>
+      </p:sp>
+      <p:sp>
+        <p:nvSpPr>
+          <p:cNvPr id="37" name="TextBox 36"/>
           <p:cNvSpPr txBox="1"/>
           <p:nvPr/>
         </p:nvSpPr>
         <p:spPr>
           <a:xfrm>
-            <a:off x="4480560" y="4078224"/>
-            <a:ext cx="2514600" cy="256032"/>
+            <a:off x="8119872" y="4480560"/>
+            <a:ext cx="3611880" cy="320040"/>
           </a:xfrm>
           <a:prstGeom prst="rect">
             <a:avLst/>
@@ -4548,70 +4527,27 @@
           <a:p>
             <a:pPr algn="l"/>
             <a:r>
-              <a:rPr sz="900" b="1">
-                <a:solidFill>
-                  <a:srgbClr val="FFFFFF"/>
+              <a:rPr sz="1250" b="1">
+                <a:solidFill>
+                  <a:srgbClr val="1A202C"/>
                 </a:solidFill>
                 <a:latin typeface="Segoe UI"/>
               </a:rPr>
-              <a:t>PLANNER AGENT  +  POWERPOINT AGENT</a:t>
-            </a:r>
-          </a:p>
-        </p:txBody>
-      </p:sp>
-      <p:sp>
-        <p:nvSpPr>
-          <p:cNvPr id="39" name="Rounded Rectangle 38"/>
-          <p:cNvSpPr/>
-          <p:nvPr/>
-        </p:nvSpPr>
-        <p:spPr>
-          <a:xfrm>
-            <a:off x="6949440" y="4059936"/>
-            <a:ext cx="731520" cy="256032"/>
-          </a:xfrm>
-          <a:prstGeom prst="roundRect">
-            <a:avLst/>
-          </a:prstGeom>
-          <a:solidFill>
-            <a:srgbClr val="FFFFFF"/>
-          </a:solidFill>
-          <a:ln>
-            <a:noFill/>
-          </a:ln>
-        </p:spPr>
-        <p:style>
-          <a:lnRef idx="1">
-            <a:schemeClr val="accent1"/>
-          </a:lnRef>
-          <a:fillRef idx="3">
-            <a:schemeClr val="accent1"/>
-          </a:fillRef>
-          <a:effectRef idx="2">
-            <a:schemeClr val="accent1"/>
-          </a:effectRef>
-          <a:fontRef idx="minor">
-            <a:schemeClr val="lt1"/>
-          </a:fontRef>
-        </p:style>
-        <p:txBody>
-          <a:bodyPr rtlCol="0" anchor="ctr"/>
-          <a:lstStyle/>
-          <a:p>
-            <a:pPr algn="ctr"/>
-          </a:p>
-        </p:txBody>
-      </p:sp>
-      <p:sp>
-        <p:nvSpPr>
-          <p:cNvPr id="40" name="TextBox 39"/>
+              <a:t>HR policy &amp; Board resolution</a:t>
+            </a:r>
+          </a:p>
+        </p:txBody>
+      </p:sp>
+      <p:sp>
+        <p:nvSpPr>
+          <p:cNvPr id="38" name="TextBox 37"/>
           <p:cNvSpPr txBox="1"/>
           <p:nvPr/>
         </p:nvSpPr>
         <p:spPr>
           <a:xfrm>
-            <a:off x="6949440" y="4069080"/>
-            <a:ext cx="731520" cy="246888"/>
+            <a:off x="8119872" y="4818888"/>
+            <a:ext cx="3611880" cy="1508760"/>
           </a:xfrm>
           <a:prstGeom prst="rect">
             <a:avLst/>
@@ -4619,41 +4555,6 @@
           <a:noFill/>
         </p:spPr>
         <p:txBody>
-          <a:bodyPr wrap="square" lIns="45720" rIns="45720" tIns="27432" bIns="27432" anchor="ctr">
-            <a:spAutoFit/>
-          </a:bodyPr>
-          <a:lstStyle/>
-          <a:p>
-            <a:pPr algn="ctr"/>
-            <a:r>
-              <a:rPr sz="850" b="1">
-                <a:solidFill>
-                  <a:srgbClr val="7C3AED"/>
-                </a:solidFill>
-                <a:latin typeface="Segoe UI"/>
-              </a:rPr>
-              <a:t>20 min</a:t>
-            </a:r>
-          </a:p>
-        </p:txBody>
-      </p:sp>
-      <p:sp>
-        <p:nvSpPr>
-          <p:cNvPr id="41" name="TextBox 40"/>
-          <p:cNvSpPr txBox="1"/>
-          <p:nvPr/>
-        </p:nvSpPr>
-        <p:spPr>
-          <a:xfrm>
-            <a:off x="4096512" y="4480560"/>
-            <a:ext cx="3611880" cy="320040"/>
-          </a:xfrm>
-          <a:prstGeom prst="rect">
-            <a:avLst/>
-          </a:prstGeom>
-          <a:noFill/>
-        </p:spPr>
-        <p:txBody>
           <a:bodyPr wrap="square" lIns="45720" rIns="45720" tIns="27432" bIns="27432" anchor="t">
             <a:spAutoFit/>
           </a:bodyPr>
@@ -4661,360 +4562,7 @@
           <a:p>
             <a:pPr algn="l"/>
             <a:r>
-              <a:rPr sz="1200" b="1">
-                <a:solidFill>
-                  <a:srgbClr val="1A202C"/>
-                </a:solidFill>
-                <a:latin typeface="Segoe UI"/>
-              </a:rPr>
-              <a:t>PMO weekly status</a:t>
-            </a:r>
-          </a:p>
-        </p:txBody>
-      </p:sp>
-      <p:sp>
-        <p:nvSpPr>
-          <p:cNvPr id="42" name="TextBox 41"/>
-          <p:cNvSpPr txBox="1"/>
-          <p:nvPr/>
-        </p:nvSpPr>
-        <p:spPr>
-          <a:xfrm>
-            <a:off x="4096512" y="4818888"/>
-            <a:ext cx="3611880" cy="1508760"/>
-          </a:xfrm>
-          <a:prstGeom prst="rect">
-            <a:avLst/>
-          </a:prstGeom>
-          <a:noFill/>
-        </p:spPr>
-        <p:txBody>
-          <a:bodyPr wrap="square" lIns="45720" rIns="45720" tIns="27432" bIns="27432" anchor="t">
-            <a:spAutoFit/>
-          </a:bodyPr>
-          <a:lstStyle/>
-          <a:p>
-            <a:pPr algn="l"/>
-            <a:r>
-              <a:rPr sz="900" b="0">
-                <a:solidFill>
-                  <a:srgbClr val="64748B"/>
-                </a:solidFill>
-                <a:latin typeface="Segoe UI"/>
-              </a:rPr>
-              <a:t>CORE · Planner agent — bootstrap the plan from the portfolio Excel; surface Red/Amber tasks; draft the Steering Committee weekly status — grounded in real Planner data.</a:t>
-            </a:r>
-          </a:p>
-          <a:p>
-            <a:pPr algn="l"/>
-            <a:r>
-              <a:rPr sz="900" b="0">
-                <a:solidFill>
-                  <a:srgbClr val="64748B"/>
-                </a:solidFill>
-                <a:latin typeface="Segoe UI"/>
-              </a:rPr>
-              <a:t>STRETCH · PowerPoint agent — 6-slide PMO Review deck with speaker notes.</a:t>
-            </a:r>
-          </a:p>
-        </p:txBody>
-      </p:sp>
-      <p:sp>
-        <p:nvSpPr>
-          <p:cNvPr id="43" name="Rounded Rectangle 42"/>
-          <p:cNvSpPr/>
-          <p:nvPr/>
-        </p:nvSpPr>
-        <p:spPr>
-          <a:xfrm>
-            <a:off x="7955280" y="3977640"/>
-            <a:ext cx="3886200" cy="2423160"/>
-          </a:xfrm>
-          <a:prstGeom prst="roundRect">
-            <a:avLst/>
-          </a:prstGeom>
-          <a:solidFill>
-            <a:srgbClr val="FFFFFF"/>
-          </a:solidFill>
-          <a:ln w="9525">
-            <a:solidFill>
-              <a:srgbClr val="D1D9E6"/>
-            </a:solidFill>
-          </a:ln>
-        </p:spPr>
-        <p:style>
-          <a:lnRef idx="1">
-            <a:schemeClr val="accent1"/>
-          </a:lnRef>
-          <a:fillRef idx="3">
-            <a:schemeClr val="accent1"/>
-          </a:fillRef>
-          <a:effectRef idx="2">
-            <a:schemeClr val="accent1"/>
-          </a:effectRef>
-          <a:fontRef idx="minor">
-            <a:schemeClr val="lt1"/>
-          </a:fontRef>
-        </p:style>
-        <p:txBody>
-          <a:bodyPr rtlCol="0" anchor="ctr"/>
-          <a:lstStyle/>
-          <a:p>
-            <a:pPr algn="ctr"/>
-          </a:p>
-        </p:txBody>
-      </p:sp>
-      <p:sp>
-        <p:nvSpPr>
-          <p:cNvPr id="44" name="Rectangle 43"/>
-          <p:cNvSpPr/>
-          <p:nvPr/>
-        </p:nvSpPr>
-        <p:spPr>
-          <a:xfrm>
-            <a:off x="7955280" y="3977640"/>
-            <a:ext cx="3886200" cy="411480"/>
-          </a:xfrm>
-          <a:prstGeom prst="rect">
-            <a:avLst/>
-          </a:prstGeom>
-          <a:solidFill>
-            <a:srgbClr val="0E7490"/>
-          </a:solidFill>
-          <a:ln>
-            <a:noFill/>
-          </a:ln>
-        </p:spPr>
-        <p:style>
-          <a:lnRef idx="1">
-            <a:schemeClr val="accent1"/>
-          </a:lnRef>
-          <a:fillRef idx="3">
-            <a:schemeClr val="accent1"/>
-          </a:fillRef>
-          <a:effectRef idx="2">
-            <a:schemeClr val="accent1"/>
-          </a:effectRef>
-          <a:fontRef idx="minor">
-            <a:schemeClr val="lt1"/>
-          </a:fontRef>
-        </p:style>
-        <p:txBody>
-          <a:bodyPr rtlCol="0" anchor="ctr"/>
-          <a:lstStyle/>
-          <a:p>
-            <a:pPr algn="ctr"/>
-          </a:p>
-        </p:txBody>
-      </p:sp>
-      <p:sp>
-        <p:nvSpPr>
-          <p:cNvPr id="45" name="TextBox 44"/>
-          <p:cNvSpPr txBox="1"/>
-          <p:nvPr/>
-        </p:nvSpPr>
-        <p:spPr>
-          <a:xfrm>
-            <a:off x="8092440" y="4050792"/>
-            <a:ext cx="457200" cy="274320"/>
-          </a:xfrm>
-          <a:prstGeom prst="rect">
-            <a:avLst/>
-          </a:prstGeom>
-          <a:noFill/>
-        </p:spPr>
-        <p:txBody>
-          <a:bodyPr wrap="square" lIns="45720" rIns="45720" tIns="27432" bIns="27432" anchor="t">
-            <a:spAutoFit/>
-          </a:bodyPr>
-          <a:lstStyle/>
-          <a:p>
-            <a:pPr algn="l"/>
-            <a:r>
-              <a:rPr sz="1300" b="1">
-                <a:solidFill>
-                  <a:srgbClr val="FFFFFF"/>
-                </a:solidFill>
-                <a:latin typeface="Segoe UI"/>
-              </a:rPr>
-              <a:t>04</a:t>
-            </a:r>
-          </a:p>
-        </p:txBody>
-      </p:sp>
-      <p:sp>
-        <p:nvSpPr>
-          <p:cNvPr id="46" name="TextBox 45"/>
-          <p:cNvSpPr txBox="1"/>
-          <p:nvPr/>
-        </p:nvSpPr>
-        <p:spPr>
-          <a:xfrm>
-            <a:off x="8503920" y="4078224"/>
-            <a:ext cx="2514600" cy="256032"/>
-          </a:xfrm>
-          <a:prstGeom prst="rect">
-            <a:avLst/>
-          </a:prstGeom>
-          <a:noFill/>
-        </p:spPr>
-        <p:txBody>
-          <a:bodyPr wrap="square" lIns="45720" rIns="45720" tIns="27432" bIns="27432" anchor="t">
-            <a:spAutoFit/>
-          </a:bodyPr>
-          <a:lstStyle/>
-          <a:p>
-            <a:pPr algn="l"/>
-            <a:r>
-              <a:rPr sz="900" b="1">
-                <a:solidFill>
-                  <a:srgbClr val="FFFFFF"/>
-                </a:solidFill>
-                <a:latin typeface="Segoe UI"/>
-              </a:rPr>
-              <a:t>WORD COPILOT  +  COWORK</a:t>
-            </a:r>
-          </a:p>
-        </p:txBody>
-      </p:sp>
-      <p:sp>
-        <p:nvSpPr>
-          <p:cNvPr id="47" name="Rounded Rectangle 46"/>
-          <p:cNvSpPr/>
-          <p:nvPr/>
-        </p:nvSpPr>
-        <p:spPr>
-          <a:xfrm>
-            <a:off x="10972800" y="4059936"/>
-            <a:ext cx="731520" cy="256032"/>
-          </a:xfrm>
-          <a:prstGeom prst="roundRect">
-            <a:avLst/>
-          </a:prstGeom>
-          <a:solidFill>
-            <a:srgbClr val="FFFFFF"/>
-          </a:solidFill>
-          <a:ln>
-            <a:noFill/>
-          </a:ln>
-        </p:spPr>
-        <p:style>
-          <a:lnRef idx="1">
-            <a:schemeClr val="accent1"/>
-          </a:lnRef>
-          <a:fillRef idx="3">
-            <a:schemeClr val="accent1"/>
-          </a:fillRef>
-          <a:effectRef idx="2">
-            <a:schemeClr val="accent1"/>
-          </a:effectRef>
-          <a:fontRef idx="minor">
-            <a:schemeClr val="lt1"/>
-          </a:fontRef>
-        </p:style>
-        <p:txBody>
-          <a:bodyPr rtlCol="0" anchor="ctr"/>
-          <a:lstStyle/>
-          <a:p>
-            <a:pPr algn="ctr"/>
-          </a:p>
-        </p:txBody>
-      </p:sp>
-      <p:sp>
-        <p:nvSpPr>
-          <p:cNvPr id="48" name="TextBox 47"/>
-          <p:cNvSpPr txBox="1"/>
-          <p:nvPr/>
-        </p:nvSpPr>
-        <p:spPr>
-          <a:xfrm>
-            <a:off x="10972800" y="4069080"/>
-            <a:ext cx="731520" cy="246888"/>
-          </a:xfrm>
-          <a:prstGeom prst="rect">
-            <a:avLst/>
-          </a:prstGeom>
-          <a:noFill/>
-        </p:spPr>
-        <p:txBody>
-          <a:bodyPr wrap="square" lIns="45720" rIns="45720" tIns="27432" bIns="27432" anchor="ctr">
-            <a:spAutoFit/>
-          </a:bodyPr>
-          <a:lstStyle/>
-          <a:p>
-            <a:pPr algn="ctr"/>
-            <a:r>
-              <a:rPr sz="850" b="1">
-                <a:solidFill>
-                  <a:srgbClr val="0E7490"/>
-                </a:solidFill>
-                <a:latin typeface="Segoe UI"/>
-              </a:rPr>
-              <a:t>20 min</a:t>
-            </a:r>
-          </a:p>
-        </p:txBody>
-      </p:sp>
-      <p:sp>
-        <p:nvSpPr>
-          <p:cNvPr id="49" name="TextBox 48"/>
-          <p:cNvSpPr txBox="1"/>
-          <p:nvPr/>
-        </p:nvSpPr>
-        <p:spPr>
-          <a:xfrm>
-            <a:off x="8119872" y="4480560"/>
-            <a:ext cx="3611880" cy="320040"/>
-          </a:xfrm>
-          <a:prstGeom prst="rect">
-            <a:avLst/>
-          </a:prstGeom>
-          <a:noFill/>
-        </p:spPr>
-        <p:txBody>
-          <a:bodyPr wrap="square" lIns="45720" rIns="45720" tIns="27432" bIns="27432" anchor="t">
-            <a:spAutoFit/>
-          </a:bodyPr>
-          <a:lstStyle/>
-          <a:p>
-            <a:pPr algn="l"/>
-            <a:r>
-              <a:rPr sz="1200" b="1">
-                <a:solidFill>
-                  <a:srgbClr val="1A202C"/>
-                </a:solidFill>
-                <a:latin typeface="Segoe UI"/>
-              </a:rPr>
-              <a:t>HR policy &amp; Board resolution</a:t>
-            </a:r>
-          </a:p>
-        </p:txBody>
-      </p:sp>
-      <p:sp>
-        <p:nvSpPr>
-          <p:cNvPr id="50" name="TextBox 49"/>
-          <p:cNvSpPr txBox="1"/>
-          <p:nvPr/>
-        </p:nvSpPr>
-        <p:spPr>
-          <a:xfrm>
-            <a:off x="8119872" y="4818888"/>
-            <a:ext cx="3611880" cy="1508760"/>
-          </a:xfrm>
-          <a:prstGeom prst="rect">
-            <a:avLst/>
-          </a:prstGeom>
-          <a:noFill/>
-        </p:spPr>
-        <p:txBody>
-          <a:bodyPr wrap="square" lIns="45720" rIns="45720" tIns="27432" bIns="27432" anchor="t">
-            <a:spAutoFit/>
-          </a:bodyPr>
-          <a:lstStyle/>
-          <a:p>
-            <a:pPr algn="l"/>
-            <a:r>
-              <a:rPr sz="900" b="0">
+              <a:rPr sz="950" b="0">
                 <a:solidFill>
                   <a:srgbClr val="64748B"/>
                 </a:solidFill>
@@ -5026,7 +4574,7 @@
           <a:p>
             <a:pPr algn="l"/>
             <a:r>
-              <a:rPr sz="900" b="0">
+              <a:rPr sz="950" b="0">
                 <a:solidFill>
                   <a:srgbClr val="64748B"/>
                 </a:solidFill>
@@ -5039,7 +4587,7 @@
       </p:sp>
       <p:sp>
         <p:nvSpPr>
-          <p:cNvPr id="51" name="TextBox 50"/>
+          <p:cNvPr id="39" name="TextBox 38"/>
           <p:cNvSpPr txBox="1"/>
           <p:nvPr/>
         </p:nvSpPr>
